--- a/powerpoint-template/trusthlt-slides-example1.pptx
+++ b/powerpoint-template/trusthlt-slides-example1.pptx
@@ -135,7 +135,7 @@
       </p:grpSpPr>
       <p:sp>
         <p:nvSpPr>
-          <p:cNvPr id="2" name="Header Placeholder 1"/>
+          <p:cNvPr id="1258727023" name="Header Placeholder 1"/>
           <p:cNvSpPr>
             <a:spLocks noGrp="1"/>
           </p:cNvSpPr>
@@ -169,7 +169,7 @@
       </p:sp>
       <p:sp>
         <p:nvSpPr>
-          <p:cNvPr id="3" name="Date Placeholder 2"/>
+          <p:cNvPr id="530173369" name="Date Placeholder 2"/>
           <p:cNvSpPr>
             <a:spLocks noGrp="1"/>
           </p:cNvSpPr>
@@ -203,7 +203,7 @@
       </p:sp>
       <p:sp>
         <p:nvSpPr>
-          <p:cNvPr id="3" name="Date Placeholder 2"/>
+          <p:cNvPr id="422761486" name="Date Placeholder 2"/>
           <p:cNvSpPr>
             <a:spLocks noGrp="1"/>
           </p:cNvSpPr>
@@ -237,7 +237,7 @@
       </p:sp>
       <p:sp>
         <p:nvSpPr>
-          <p:cNvPr id="5" name="Notes Placeholder 4"/>
+          <p:cNvPr id="13542836" name="Notes Placeholder 4"/>
           <p:cNvSpPr>
             <a:spLocks noGrp="1"/>
           </p:cNvSpPr>
@@ -267,7 +267,7 @@
       </p:sp>
       <p:sp>
         <p:nvSpPr>
-          <p:cNvPr id="6" name="Footer Placeholder 5"/>
+          <p:cNvPr id="1699189793" name="Footer Placeholder 5"/>
           <p:cNvSpPr>
             <a:spLocks noGrp="1"/>
           </p:cNvSpPr>
@@ -301,7 +301,7 @@
       </p:sp>
       <p:sp>
         <p:nvSpPr>
-          <p:cNvPr id="7" name="Slide Number Placeholder 6"/>
+          <p:cNvPr id="354024171" name="Slide Number Placeholder 6"/>
           <p:cNvSpPr>
             <a:spLocks noGrp="1"/>
           </p:cNvSpPr>
@@ -450,7 +450,7 @@
       </p:grpSpPr>
       <p:sp>
         <p:nvSpPr>
-          <p:cNvPr id="2" name="Slide Image Placeholder 1"/>
+          <p:cNvPr id="1684138105" name="Slide Image Placeholder 1"/>
           <p:cNvSpPr>
             <a:spLocks noChangeAspect="1" noGrp="1" noRot="1"/>
           </p:cNvSpPr>
@@ -462,7 +462,7 @@
       </p:sp>
       <p:sp>
         <p:nvSpPr>
-          <p:cNvPr id="3" name="Notes Placeholder 2"/>
+          <p:cNvPr id="390843460" name="Notes Placeholder 2"/>
           <p:cNvSpPr>
             <a:spLocks noGrp="1"/>
           </p:cNvSpPr>
@@ -484,7 +484,7 @@
       </p:sp>
       <p:sp>
         <p:nvSpPr>
-          <p:cNvPr id="4" name="Slide Number Placeholder 3"/>
+          <p:cNvPr id="2105929346" name="Slide Number Placeholder 3"/>
           <p:cNvSpPr>
             <a:spLocks noGrp="1"/>
           </p:cNvSpPr>
@@ -535,7 +535,7 @@
       </p:grpSpPr>
       <p:sp>
         <p:nvSpPr>
-          <p:cNvPr id="2" name="Slide Image Placeholder 1"/>
+          <p:cNvPr id="2146793347" name="Slide Image Placeholder 1"/>
           <p:cNvSpPr>
             <a:spLocks noChangeAspect="1" noGrp="1" noRot="1"/>
           </p:cNvSpPr>
@@ -547,7 +547,7 @@
       </p:sp>
       <p:sp>
         <p:nvSpPr>
-          <p:cNvPr id="3" name="Notes Placeholder 2"/>
+          <p:cNvPr id="1433411743" name="Notes Placeholder 2"/>
           <p:cNvSpPr>
             <a:spLocks noGrp="1"/>
           </p:cNvSpPr>
@@ -569,7 +569,7 @@
       </p:sp>
       <p:sp>
         <p:nvSpPr>
-          <p:cNvPr id="4" name="Slide Number Placeholder 3"/>
+          <p:cNvPr id="2020365519" name="Slide Number Placeholder 3"/>
           <p:cNvSpPr>
             <a:spLocks noGrp="1"/>
           </p:cNvSpPr>
@@ -620,7 +620,7 @@
       </p:grpSpPr>
       <p:sp>
         <p:nvSpPr>
-          <p:cNvPr id="1322852767" name="Title 1"/>
+          <p:cNvPr id="1941547861" name="Title 1"/>
           <p:cNvSpPr>
             <a:spLocks noGrp="1"/>
           </p:cNvSpPr>
@@ -681,7 +681,7 @@
       </p:sp>
       <p:sp>
         <p:nvSpPr>
-          <p:cNvPr id="455043742" name="Subtitle 2"/>
+          <p:cNvPr id="1544876072" name="Subtitle 2"/>
           <p:cNvSpPr>
             <a:spLocks noGrp="1"/>
           </p:cNvSpPr>
@@ -785,7 +785,7 @@
       </p:sp>
       <p:pic>
         <p:nvPicPr>
-          <p:cNvPr id="1142675236" name=""/>
+          <p:cNvPr id="1851268594" name=""/>
           <p:cNvPicPr>
             <a:picLocks noChangeAspect="1"/>
           </p:cNvPicPr>
@@ -813,14 +813,14 @@
       </p:pic>
       <p:sp>
         <p:nvSpPr>
-          <p:cNvPr id="768534249" name=""/>
+          <p:cNvPr id="1254081248" name=""/>
           <p:cNvSpPr txBox="1"/>
           <p:nvPr/>
         </p:nvSpPr>
         <p:spPr bwMode="auto">
           <a:xfrm rot="0" flipH="0" flipV="0">
-            <a:off x="390523" y="5695767"/>
-            <a:ext cx="7451660" cy="823319"/>
+            <a:off x="390522" y="5695767"/>
+            <a:ext cx="7452019" cy="823319"/>
           </a:xfrm>
           <a:prstGeom prst="rect">
             <a:avLst/>
@@ -876,7 +876,7 @@
                 <a:ea typeface="RubFlama Light"/>
                 <a:cs typeface="RubFlama Light"/>
               </a:rPr>
-              <a:t>Ruhr University Bochu &amp; Research Center Trustworthy Data Science and Security</a:t>
+              <a:t>Ruhr University Bochum &amp; Research Center Trustworthy Data Science and Security</a:t>
             </a:r>
             <a:endParaRPr sz="1600">
               <a:latin typeface="RubFlama Light"/>
@@ -887,7 +887,7 @@
       </p:sp>
       <p:pic>
         <p:nvPicPr>
-          <p:cNvPr id="514587850" name=""/>
+          <p:cNvPr id="712133294" name=""/>
           <p:cNvPicPr>
             <a:picLocks noChangeAspect="1"/>
           </p:cNvPicPr>
@@ -915,7 +915,7 @@
       </p:pic>
       <p:pic>
         <p:nvPicPr>
-          <p:cNvPr id="1415915008" name=""/>
+          <p:cNvPr id="160745041" name=""/>
           <p:cNvPicPr>
             <a:picLocks noChangeAspect="1"/>
           </p:cNvPicPr>
@@ -968,7 +968,7 @@
       </p:grpSpPr>
       <p:sp>
         <p:nvSpPr>
-          <p:cNvPr id="1227626079" name="Title 1"/>
+          <p:cNvPr id="66006017" name="Title 1"/>
           <p:cNvSpPr>
             <a:spLocks noGrp="1"/>
           </p:cNvSpPr>
@@ -994,7 +994,7 @@
       </p:sp>
       <p:sp>
         <p:nvSpPr>
-          <p:cNvPr id="661894908" name="Content Placeholder 2"/>
+          <p:cNvPr id="1039152133" name="Content Placeholder 2"/>
           <p:cNvSpPr>
             <a:spLocks noGrp="1"/>
           </p:cNvSpPr>
@@ -1060,7 +1060,7 @@
       </p:sp>
       <p:sp>
         <p:nvSpPr>
-          <p:cNvPr id="814828717" name="Footer Placeholder 4"/>
+          <p:cNvPr id="455411287" name="Footer Placeholder 4"/>
           <p:cNvSpPr>
             <a:spLocks noGrp="1"/>
           </p:cNvSpPr>
@@ -1086,7 +1086,7 @@
       </p:sp>
       <p:sp>
         <p:nvSpPr>
-          <p:cNvPr id="584857845" name="Slide Number Placeholder 5"/>
+          <p:cNvPr id="1078434609" name="Slide Number Placeholder 5"/>
           <p:cNvSpPr>
             <a:spLocks noGrp="1"/>
           </p:cNvSpPr>
@@ -1112,7 +1112,7 @@
       </p:sp>
       <p:sp>
         <p:nvSpPr>
-          <p:cNvPr id="1087835501" name="Content Placeholder 7"/>
+          <p:cNvPr id="1808279200" name="Content Placeholder 7"/>
           <p:cNvSpPr>
             <a:spLocks noGrp="1"/>
           </p:cNvSpPr>
@@ -1236,7 +1236,7 @@
       </p:sp>
       <p:sp>
         <p:nvSpPr>
-          <p:cNvPr id="1734605054" name=""/>
+          <p:cNvPr id="233284481" name=""/>
           <p:cNvSpPr txBox="1"/>
           <p:nvPr/>
         </p:nvSpPr>
@@ -1291,7 +1291,7 @@
       </p:sp>
       <p:pic>
         <p:nvPicPr>
-          <p:cNvPr id="1386997680" name=""/>
+          <p:cNvPr id="2006728940" name=""/>
           <p:cNvPicPr>
             <a:picLocks noChangeAspect="1"/>
           </p:cNvPicPr>
@@ -1349,7 +1349,7 @@
       </p:grpSpPr>
       <p:sp>
         <p:nvSpPr>
-          <p:cNvPr id="1549334231" name="Title Placeholder 1"/>
+          <p:cNvPr id="74289637" name="Title Placeholder 1"/>
           <p:cNvSpPr>
             <a:spLocks noGrp="1"/>
           </p:cNvSpPr>
@@ -1476,7 +1476,7 @@
       </p:sp>
       <p:sp>
         <p:nvSpPr>
-          <p:cNvPr id="845402613" name="Text Placeholder 2"/>
+          <p:cNvPr id="763369329" name="Text Placeholder 2"/>
           <p:cNvSpPr>
             <a:spLocks noGrp="1"/>
           </p:cNvSpPr>
@@ -1586,7 +1586,7 @@
       </p:sp>
       <p:sp>
         <p:nvSpPr>
-          <p:cNvPr id="1942908782" name="Footer Placeholder 4"/>
+          <p:cNvPr id="848752321" name="Footer Placeholder 4"/>
           <p:cNvSpPr>
             <a:spLocks noGrp="1"/>
           </p:cNvSpPr>
@@ -1711,7 +1711,7 @@
       </p:sp>
       <p:sp>
         <p:nvSpPr>
-          <p:cNvPr id="2140012337" name="Slide Number Placeholder 5"/>
+          <p:cNvPr id="1770323293" name="Slide Number Placeholder 5"/>
           <p:cNvSpPr>
             <a:spLocks noGrp="1"/>
           </p:cNvSpPr>
@@ -2144,7 +2144,7 @@
       </p:grpSpPr>
       <p:sp>
         <p:nvSpPr>
-          <p:cNvPr id="749157894" name="Title 1"/>
+          <p:cNvPr id="2124733702" name="Title 1"/>
           <p:cNvSpPr>
             <a:spLocks noGrp="1"/>
           </p:cNvSpPr>
@@ -2210,7 +2210,7 @@
       </p:sp>
       <p:sp>
         <p:nvSpPr>
-          <p:cNvPr id="69273816" name="Subtitle 2"/>
+          <p:cNvPr id="1097443534" name="Subtitle 2"/>
           <p:cNvSpPr>
             <a:spLocks noGrp="1"/>
           </p:cNvSpPr>
@@ -2220,7 +2220,7 @@
         </p:nvSpPr>
         <p:spPr bwMode="auto">
           <a:xfrm flipH="0" flipV="0">
-            <a:off x="390523" y="2774155"/>
+            <a:off x="390523" y="2774154"/>
             <a:ext cx="8468698" cy="1245393"/>
           </a:xfrm>
         </p:spPr>
@@ -2402,7 +2402,7 @@
       </p:grpSpPr>
       <p:sp>
         <p:nvSpPr>
-          <p:cNvPr id="1090381" name="Title 1"/>
+          <p:cNvPr id="1917342649" name="Title 1"/>
           <p:cNvSpPr>
             <a:spLocks noGrp="1"/>
           </p:cNvSpPr>
@@ -2435,7 +2435,7 @@
       </p:sp>
       <p:sp>
         <p:nvSpPr>
-          <p:cNvPr id="2003994694" name="Content Placeholder 2"/>
+          <p:cNvPr id="1016841802" name="Content Placeholder 2"/>
           <p:cNvSpPr>
             <a:spLocks noGrp="1"/>
           </p:cNvSpPr>
@@ -2514,7 +2514,7 @@
       </p:sp>
       <p:sp>
         <p:nvSpPr>
-          <p:cNvPr id="41482474" name="Footer Placeholder 4"/>
+          <p:cNvPr id="1671750377" name="Footer Placeholder 4"/>
           <p:cNvSpPr>
             <a:spLocks noGrp="1"/>
           </p:cNvSpPr>
@@ -2540,7 +2540,7 @@
       </p:sp>
       <p:sp>
         <p:nvSpPr>
-          <p:cNvPr id="860851411" name="Slide Number Placeholder 5"/>
+          <p:cNvPr id="1959033561" name="Slide Number Placeholder 5"/>
           <p:cNvSpPr>
             <a:spLocks noGrp="1"/>
           </p:cNvSpPr>
@@ -2566,7 +2566,7 @@
       </p:sp>
       <p:sp>
         <p:nvSpPr>
-          <p:cNvPr id="1258888457" name="Content Placeholder 7"/>
+          <p:cNvPr id="726540962" name="Content Placeholder 7"/>
           <p:cNvSpPr>
             <a:spLocks noGrp="1"/>
           </p:cNvSpPr>
